--- a/DOCUMENTATION/Illustrations.pptx
+++ b/DOCUMENTATION/Illustrations.pptx
@@ -6,6 +6,8 @@
   </p:sldMasterIdLst>
   <p:sldIdLst>
     <p:sldId id="256" r:id="rId2"/>
+    <p:sldId id="257" r:id="rId3"/>
+    <p:sldId id="258" r:id="rId4"/>
   </p:sldIdLst>
   <p:sldSz cx="12192000" cy="6858000"/>
   <p:notesSz cx="6858000" cy="9144000"/>
@@ -104,6 +106,11 @@
       </a:defRPr>
     </a:lvl9pPr>
   </p:defaultTextStyle>
+  <p:extLst>
+    <p:ext uri="{EFAFB233-063F-42B5-8137-9DF3F51BA10A}">
+      <p15:sldGuideLst xmlns:p15="http://schemas.microsoft.com/office/powerpoint/2012/main"/>
+    </p:ext>
+  </p:extLst>
 </p:presentation>
 </file>
 
@@ -254,7 +261,7 @@
           <a:p>
             <a:fld id="{EFF2BB32-B62A-4B9C-8E6D-492F3CC71671}" type="datetimeFigureOut">
               <a:rPr lang="fr-FR" smtClean="0"/>
-              <a:t>20/06/2023</a:t>
+              <a:t>01/08/2025</a:t>
             </a:fld>
             <a:endParaRPr lang="fr-FR"/>
           </a:p>
@@ -452,7 +459,7 @@
           <a:p>
             <a:fld id="{EFF2BB32-B62A-4B9C-8E6D-492F3CC71671}" type="datetimeFigureOut">
               <a:rPr lang="fr-FR" smtClean="0"/>
-              <a:t>20/06/2023</a:t>
+              <a:t>01/08/2025</a:t>
             </a:fld>
             <a:endParaRPr lang="fr-FR"/>
           </a:p>
@@ -660,7 +667,7 @@
           <a:p>
             <a:fld id="{EFF2BB32-B62A-4B9C-8E6D-492F3CC71671}" type="datetimeFigureOut">
               <a:rPr lang="fr-FR" smtClean="0"/>
-              <a:t>20/06/2023</a:t>
+              <a:t>01/08/2025</a:t>
             </a:fld>
             <a:endParaRPr lang="fr-FR"/>
           </a:p>
@@ -858,7 +865,7 @@
           <a:p>
             <a:fld id="{EFF2BB32-B62A-4B9C-8E6D-492F3CC71671}" type="datetimeFigureOut">
               <a:rPr lang="fr-FR" smtClean="0"/>
-              <a:t>20/06/2023</a:t>
+              <a:t>01/08/2025</a:t>
             </a:fld>
             <a:endParaRPr lang="fr-FR"/>
           </a:p>
@@ -1133,7 +1140,7 @@
           <a:p>
             <a:fld id="{EFF2BB32-B62A-4B9C-8E6D-492F3CC71671}" type="datetimeFigureOut">
               <a:rPr lang="fr-FR" smtClean="0"/>
-              <a:t>20/06/2023</a:t>
+              <a:t>01/08/2025</a:t>
             </a:fld>
             <a:endParaRPr lang="fr-FR"/>
           </a:p>
@@ -1398,7 +1405,7 @@
           <a:p>
             <a:fld id="{EFF2BB32-B62A-4B9C-8E6D-492F3CC71671}" type="datetimeFigureOut">
               <a:rPr lang="fr-FR" smtClean="0"/>
-              <a:t>20/06/2023</a:t>
+              <a:t>01/08/2025</a:t>
             </a:fld>
             <a:endParaRPr lang="fr-FR"/>
           </a:p>
@@ -1810,7 +1817,7 @@
           <a:p>
             <a:fld id="{EFF2BB32-B62A-4B9C-8E6D-492F3CC71671}" type="datetimeFigureOut">
               <a:rPr lang="fr-FR" smtClean="0"/>
-              <a:t>20/06/2023</a:t>
+              <a:t>01/08/2025</a:t>
             </a:fld>
             <a:endParaRPr lang="fr-FR"/>
           </a:p>
@@ -1951,7 +1958,7 @@
           <a:p>
             <a:fld id="{EFF2BB32-B62A-4B9C-8E6D-492F3CC71671}" type="datetimeFigureOut">
               <a:rPr lang="fr-FR" smtClean="0"/>
-              <a:t>20/06/2023</a:t>
+              <a:t>01/08/2025</a:t>
             </a:fld>
             <a:endParaRPr lang="fr-FR"/>
           </a:p>
@@ -2064,7 +2071,7 @@
           <a:p>
             <a:fld id="{EFF2BB32-B62A-4B9C-8E6D-492F3CC71671}" type="datetimeFigureOut">
               <a:rPr lang="fr-FR" smtClean="0"/>
-              <a:t>20/06/2023</a:t>
+              <a:t>01/08/2025</a:t>
             </a:fld>
             <a:endParaRPr lang="fr-FR"/>
           </a:p>
@@ -2375,7 +2382,7 @@
           <a:p>
             <a:fld id="{EFF2BB32-B62A-4B9C-8E6D-492F3CC71671}" type="datetimeFigureOut">
               <a:rPr lang="fr-FR" smtClean="0"/>
-              <a:t>20/06/2023</a:t>
+              <a:t>01/08/2025</a:t>
             </a:fld>
             <a:endParaRPr lang="fr-FR"/>
           </a:p>
@@ -2663,7 +2670,7 @@
           <a:p>
             <a:fld id="{EFF2BB32-B62A-4B9C-8E6D-492F3CC71671}" type="datetimeFigureOut">
               <a:rPr lang="fr-FR" smtClean="0"/>
-              <a:t>20/06/2023</a:t>
+              <a:t>01/08/2025</a:t>
             </a:fld>
             <a:endParaRPr lang="fr-FR"/>
           </a:p>
@@ -2904,7 +2911,7 @@
           <a:p>
             <a:fld id="{EFF2BB32-B62A-4B9C-8E6D-492F3CC71671}" type="datetimeFigureOut">
               <a:rPr lang="fr-FR" smtClean="0"/>
-              <a:t>20/06/2023</a:t>
+              <a:t>01/08/2025</a:t>
             </a:fld>
             <a:endParaRPr lang="fr-FR"/>
           </a:p>
@@ -4363,6 +4370,775 @@
 </p:sld>
 </file>
 
+<file path=ppt/slides/slide2.xml><?xml version="1.0" encoding="utf-8"?>
+<p:sld xmlns:a="http://schemas.openxmlformats.org/drawingml/2006/main" xmlns:r="http://schemas.openxmlformats.org/officeDocument/2006/relationships" xmlns:p="http://schemas.openxmlformats.org/presentationml/2006/main">
+  <p:cSld>
+    <p:spTree>
+      <p:nvGrpSpPr>
+        <p:cNvPr id="1" name=""/>
+        <p:cNvGrpSpPr/>
+        <p:nvPr/>
+      </p:nvGrpSpPr>
+      <p:grpSpPr>
+        <a:xfrm>
+          <a:off x="0" y="0"/>
+          <a:ext cx="0" cy="0"/>
+          <a:chOff x="0" y="0"/>
+          <a:chExt cx="0" cy="0"/>
+        </a:xfrm>
+      </p:grpSpPr>
+      <p:grpSp>
+        <p:nvGrpSpPr>
+          <p:cNvPr id="13" name="Groupe 12">
+            <a:extLst>
+              <a:ext uri="{FF2B5EF4-FFF2-40B4-BE49-F238E27FC236}">
+                <a16:creationId xmlns:a16="http://schemas.microsoft.com/office/drawing/2014/main" id="{BFEF0A4F-B6B8-9523-8595-83ED5798E78A}"/>
+              </a:ext>
+            </a:extLst>
+          </p:cNvPr>
+          <p:cNvGrpSpPr/>
+          <p:nvPr/>
+        </p:nvGrpSpPr>
+        <p:grpSpPr>
+          <a:xfrm>
+            <a:off x="2539817" y="310990"/>
+            <a:ext cx="7112366" cy="6236020"/>
+            <a:chOff x="2539817" y="310990"/>
+            <a:chExt cx="7112366" cy="6236020"/>
+          </a:xfrm>
+        </p:grpSpPr>
+        <p:pic>
+          <p:nvPicPr>
+            <p:cNvPr id="8" name="Image 7">
+              <a:extLst>
+                <a:ext uri="{FF2B5EF4-FFF2-40B4-BE49-F238E27FC236}">
+                  <a16:creationId xmlns:a16="http://schemas.microsoft.com/office/drawing/2014/main" id="{CFE07C64-BC3E-6055-D569-234E904B87B9}"/>
+                </a:ext>
+              </a:extLst>
+            </p:cNvPr>
+            <p:cNvPicPr>
+              <a:picLocks noChangeAspect="1"/>
+            </p:cNvPicPr>
+            <p:nvPr/>
+          </p:nvPicPr>
+          <p:blipFill>
+            <a:blip r:embed="rId2"/>
+            <a:stretch>
+              <a:fillRect/>
+            </a:stretch>
+          </p:blipFill>
+          <p:spPr>
+            <a:xfrm>
+              <a:off x="2539817" y="310990"/>
+              <a:ext cx="7112366" cy="6236020"/>
+            </a:xfrm>
+            <a:prstGeom prst="rect">
+              <a:avLst/>
+            </a:prstGeom>
+          </p:spPr>
+        </p:pic>
+        <p:sp>
+          <p:nvSpPr>
+            <p:cNvPr id="4" name="Ellipse 3">
+              <a:extLst>
+                <a:ext uri="{FF2B5EF4-FFF2-40B4-BE49-F238E27FC236}">
+                  <a16:creationId xmlns:a16="http://schemas.microsoft.com/office/drawing/2014/main" id="{4C5B0757-C63D-1B78-C01F-BA372E3F2DF6}"/>
+                </a:ext>
+              </a:extLst>
+            </p:cNvPr>
+            <p:cNvSpPr/>
+            <p:nvPr/>
+          </p:nvSpPr>
+          <p:spPr>
+            <a:xfrm>
+              <a:off x="3275316" y="1570934"/>
+              <a:ext cx="428264" cy="428264"/>
+            </a:xfrm>
+            <a:prstGeom prst="ellipse">
+              <a:avLst/>
+            </a:prstGeom>
+            <a:solidFill>
+              <a:schemeClr val="bg1"/>
+            </a:solidFill>
+            <a:ln w="28575">
+              <a:solidFill>
+                <a:schemeClr val="accent2"/>
+              </a:solidFill>
+            </a:ln>
+            <a:effectLst/>
+          </p:spPr>
+          <p:style>
+            <a:lnRef idx="2">
+              <a:schemeClr val="accent1">
+                <a:shade val="15000"/>
+              </a:schemeClr>
+            </a:lnRef>
+            <a:fillRef idx="1">
+              <a:schemeClr val="accent1"/>
+            </a:fillRef>
+            <a:effectRef idx="0">
+              <a:schemeClr val="accent1"/>
+            </a:effectRef>
+            <a:fontRef idx="minor">
+              <a:schemeClr val="lt1"/>
+            </a:fontRef>
+          </p:style>
+          <p:txBody>
+            <a:bodyPr rtlCol="0" anchor="ctr"/>
+            <a:lstStyle/>
+            <a:p>
+              <a:pPr algn="ctr"/>
+              <a:r>
+                <a:rPr lang="fr-FR" b="1" dirty="0">
+                  <a:solidFill>
+                    <a:schemeClr val="accent2"/>
+                  </a:solidFill>
+                  <a:effectLst>
+                    <a:outerShdw blurRad="38100" dist="38100" dir="2700000" algn="tl">
+                      <a:srgbClr val="000000">
+                        <a:alpha val="43137"/>
+                      </a:srgbClr>
+                    </a:outerShdw>
+                  </a:effectLst>
+                </a:rPr>
+                <a:t>1</a:t>
+              </a:r>
+            </a:p>
+          </p:txBody>
+        </p:sp>
+        <p:sp>
+          <p:nvSpPr>
+            <p:cNvPr id="5" name="Flèche : chevron 4">
+              <a:extLst>
+                <a:ext uri="{FF2B5EF4-FFF2-40B4-BE49-F238E27FC236}">
+                  <a16:creationId xmlns:a16="http://schemas.microsoft.com/office/drawing/2014/main" id="{0E41DF55-A004-6E2F-90C0-BAE9B57B677D}"/>
+                </a:ext>
+              </a:extLst>
+            </p:cNvPr>
+            <p:cNvSpPr/>
+            <p:nvPr/>
+          </p:nvSpPr>
+          <p:spPr>
+            <a:xfrm rot="10800000">
+              <a:off x="3032248" y="1669319"/>
+              <a:ext cx="231493" cy="231493"/>
+            </a:xfrm>
+            <a:prstGeom prst="chevron">
+              <a:avLst/>
+            </a:prstGeom>
+            <a:solidFill>
+              <a:schemeClr val="accent2"/>
+            </a:solidFill>
+            <a:ln>
+              <a:noFill/>
+            </a:ln>
+            <a:effectLst/>
+          </p:spPr>
+          <p:style>
+            <a:lnRef idx="2">
+              <a:schemeClr val="accent1">
+                <a:shade val="15000"/>
+              </a:schemeClr>
+            </a:lnRef>
+            <a:fillRef idx="1">
+              <a:schemeClr val="accent1"/>
+            </a:fillRef>
+            <a:effectRef idx="0">
+              <a:schemeClr val="accent1"/>
+            </a:effectRef>
+            <a:fontRef idx="minor">
+              <a:schemeClr val="lt1"/>
+            </a:fontRef>
+          </p:style>
+          <p:txBody>
+            <a:bodyPr rtlCol="0" anchor="ctr"/>
+            <a:lstStyle/>
+            <a:p>
+              <a:pPr algn="ctr"/>
+              <a:endParaRPr lang="fr-FR">
+                <a:solidFill>
+                  <a:schemeClr val="tx1"/>
+                </a:solidFill>
+              </a:endParaRPr>
+            </a:p>
+          </p:txBody>
+        </p:sp>
+        <p:sp>
+          <p:nvSpPr>
+            <p:cNvPr id="6" name="Rectangle : coins arrondis 5">
+              <a:extLst>
+                <a:ext uri="{FF2B5EF4-FFF2-40B4-BE49-F238E27FC236}">
+                  <a16:creationId xmlns:a16="http://schemas.microsoft.com/office/drawing/2014/main" id="{0852147D-302E-CFD7-1670-228C618CA6BD}"/>
+                </a:ext>
+              </a:extLst>
+            </p:cNvPr>
+            <p:cNvSpPr/>
+            <p:nvPr/>
+          </p:nvSpPr>
+          <p:spPr>
+            <a:xfrm>
+              <a:off x="2555812" y="1562639"/>
+              <a:ext cx="428263" cy="428264"/>
+            </a:xfrm>
+            <a:prstGeom prst="roundRect">
+              <a:avLst>
+                <a:gd name="adj" fmla="val 37917"/>
+              </a:avLst>
+            </a:prstGeom>
+            <a:noFill/>
+            <a:ln>
+              <a:solidFill>
+                <a:schemeClr val="accent2"/>
+              </a:solidFill>
+            </a:ln>
+            <a:effectLst>
+              <a:glow rad="63500">
+                <a:schemeClr val="accent2">
+                  <a:satMod val="175000"/>
+                  <a:alpha val="40000"/>
+                </a:schemeClr>
+              </a:glow>
+            </a:effectLst>
+          </p:spPr>
+          <p:style>
+            <a:lnRef idx="2">
+              <a:schemeClr val="accent1">
+                <a:shade val="15000"/>
+              </a:schemeClr>
+            </a:lnRef>
+            <a:fillRef idx="1">
+              <a:schemeClr val="accent1"/>
+            </a:fillRef>
+            <a:effectRef idx="0">
+              <a:schemeClr val="accent1"/>
+            </a:effectRef>
+            <a:fontRef idx="minor">
+              <a:schemeClr val="lt1"/>
+            </a:fontRef>
+          </p:style>
+          <p:txBody>
+            <a:bodyPr rtlCol="0" anchor="ctr"/>
+            <a:lstStyle/>
+            <a:p>
+              <a:pPr algn="ctr"/>
+              <a:endParaRPr lang="fr-FR"/>
+            </a:p>
+          </p:txBody>
+        </p:sp>
+        <p:sp>
+          <p:nvSpPr>
+            <p:cNvPr id="10" name="Rectangle : coins arrondis 9">
+              <a:extLst>
+                <a:ext uri="{FF2B5EF4-FFF2-40B4-BE49-F238E27FC236}">
+                  <a16:creationId xmlns:a16="http://schemas.microsoft.com/office/drawing/2014/main" id="{E7D16061-3250-7488-8E10-8D8CF2FAE54C}"/>
+                </a:ext>
+              </a:extLst>
+            </p:cNvPr>
+            <p:cNvSpPr/>
+            <p:nvPr/>
+          </p:nvSpPr>
+          <p:spPr>
+            <a:xfrm>
+              <a:off x="4933253" y="960120"/>
+              <a:ext cx="164527" cy="228600"/>
+            </a:xfrm>
+            <a:prstGeom prst="roundRect">
+              <a:avLst>
+                <a:gd name="adj" fmla="val 37917"/>
+              </a:avLst>
+            </a:prstGeom>
+            <a:noFill/>
+            <a:ln>
+              <a:solidFill>
+                <a:schemeClr val="accent2"/>
+              </a:solidFill>
+            </a:ln>
+            <a:effectLst>
+              <a:glow rad="63500">
+                <a:schemeClr val="accent2">
+                  <a:satMod val="175000"/>
+                  <a:alpha val="40000"/>
+                </a:schemeClr>
+              </a:glow>
+            </a:effectLst>
+          </p:spPr>
+          <p:style>
+            <a:lnRef idx="2">
+              <a:schemeClr val="accent1">
+                <a:shade val="15000"/>
+              </a:schemeClr>
+            </a:lnRef>
+            <a:fillRef idx="1">
+              <a:schemeClr val="accent1"/>
+            </a:fillRef>
+            <a:effectRef idx="0">
+              <a:schemeClr val="accent1"/>
+            </a:effectRef>
+            <a:fontRef idx="minor">
+              <a:schemeClr val="lt1"/>
+            </a:fontRef>
+          </p:style>
+          <p:txBody>
+            <a:bodyPr rtlCol="0" anchor="ctr"/>
+            <a:lstStyle/>
+            <a:p>
+              <a:pPr algn="ctr"/>
+              <a:endParaRPr lang="fr-FR"/>
+            </a:p>
+          </p:txBody>
+        </p:sp>
+        <p:sp>
+          <p:nvSpPr>
+            <p:cNvPr id="11" name="Ellipse 10">
+              <a:extLst>
+                <a:ext uri="{FF2B5EF4-FFF2-40B4-BE49-F238E27FC236}">
+                  <a16:creationId xmlns:a16="http://schemas.microsoft.com/office/drawing/2014/main" id="{9B7BA402-A16E-7159-7A27-45FB37B6A0D3}"/>
+                </a:ext>
+              </a:extLst>
+            </p:cNvPr>
+            <p:cNvSpPr/>
+            <p:nvPr/>
+          </p:nvSpPr>
+          <p:spPr>
+            <a:xfrm>
+              <a:off x="5416536" y="854654"/>
+              <a:ext cx="428264" cy="428264"/>
+            </a:xfrm>
+            <a:prstGeom prst="ellipse">
+              <a:avLst/>
+            </a:prstGeom>
+            <a:solidFill>
+              <a:schemeClr val="bg1"/>
+            </a:solidFill>
+            <a:ln w="28575">
+              <a:solidFill>
+                <a:schemeClr val="accent2"/>
+              </a:solidFill>
+            </a:ln>
+            <a:effectLst/>
+          </p:spPr>
+          <p:style>
+            <a:lnRef idx="2">
+              <a:schemeClr val="accent1">
+                <a:shade val="15000"/>
+              </a:schemeClr>
+            </a:lnRef>
+            <a:fillRef idx="1">
+              <a:schemeClr val="accent1"/>
+            </a:fillRef>
+            <a:effectRef idx="0">
+              <a:schemeClr val="accent1"/>
+            </a:effectRef>
+            <a:fontRef idx="minor">
+              <a:schemeClr val="lt1"/>
+            </a:fontRef>
+          </p:style>
+          <p:txBody>
+            <a:bodyPr rtlCol="0" anchor="ctr"/>
+            <a:lstStyle/>
+            <a:p>
+              <a:pPr algn="ctr"/>
+              <a:r>
+                <a:rPr lang="fr-FR" b="1" dirty="0">
+                  <a:solidFill>
+                    <a:schemeClr val="accent2"/>
+                  </a:solidFill>
+                  <a:effectLst>
+                    <a:outerShdw blurRad="38100" dist="38100" dir="2700000" algn="tl">
+                      <a:srgbClr val="000000">
+                        <a:alpha val="43137"/>
+                      </a:srgbClr>
+                    </a:outerShdw>
+                  </a:effectLst>
+                </a:rPr>
+                <a:t>2</a:t>
+              </a:r>
+            </a:p>
+          </p:txBody>
+        </p:sp>
+        <p:sp>
+          <p:nvSpPr>
+            <p:cNvPr id="12" name="Flèche : chevron 11">
+              <a:extLst>
+                <a:ext uri="{FF2B5EF4-FFF2-40B4-BE49-F238E27FC236}">
+                  <a16:creationId xmlns:a16="http://schemas.microsoft.com/office/drawing/2014/main" id="{23B156FA-9E09-DACE-24EA-3D8E57A92ED1}"/>
+                </a:ext>
+              </a:extLst>
+            </p:cNvPr>
+            <p:cNvSpPr/>
+            <p:nvPr/>
+          </p:nvSpPr>
+          <p:spPr>
+            <a:xfrm rot="10800000">
+              <a:off x="5173468" y="953039"/>
+              <a:ext cx="231493" cy="231493"/>
+            </a:xfrm>
+            <a:prstGeom prst="chevron">
+              <a:avLst/>
+            </a:prstGeom>
+            <a:solidFill>
+              <a:schemeClr val="accent2"/>
+            </a:solidFill>
+            <a:ln>
+              <a:noFill/>
+            </a:ln>
+            <a:effectLst/>
+          </p:spPr>
+          <p:style>
+            <a:lnRef idx="2">
+              <a:schemeClr val="accent1">
+                <a:shade val="15000"/>
+              </a:schemeClr>
+            </a:lnRef>
+            <a:fillRef idx="1">
+              <a:schemeClr val="accent1"/>
+            </a:fillRef>
+            <a:effectRef idx="0">
+              <a:schemeClr val="accent1"/>
+            </a:effectRef>
+            <a:fontRef idx="minor">
+              <a:schemeClr val="lt1"/>
+            </a:fontRef>
+          </p:style>
+          <p:txBody>
+            <a:bodyPr rtlCol="0" anchor="ctr"/>
+            <a:lstStyle/>
+            <a:p>
+              <a:pPr algn="ctr"/>
+              <a:endParaRPr lang="fr-FR">
+                <a:solidFill>
+                  <a:schemeClr val="tx1"/>
+                </a:solidFill>
+              </a:endParaRPr>
+            </a:p>
+          </p:txBody>
+        </p:sp>
+      </p:grpSp>
+    </p:spTree>
+    <p:extLst>
+      <p:ext uri="{BB962C8B-B14F-4D97-AF65-F5344CB8AC3E}">
+        <p14:creationId xmlns:p14="http://schemas.microsoft.com/office/powerpoint/2010/main" val="1912045746"/>
+      </p:ext>
+    </p:extLst>
+  </p:cSld>
+  <p:clrMapOvr>
+    <a:masterClrMapping/>
+  </p:clrMapOvr>
+</p:sld>
+</file>
+
+<file path=ppt/slides/slide3.xml><?xml version="1.0" encoding="utf-8"?>
+<p:sld xmlns:a="http://schemas.openxmlformats.org/drawingml/2006/main" xmlns:r="http://schemas.openxmlformats.org/officeDocument/2006/relationships" xmlns:p="http://schemas.openxmlformats.org/presentationml/2006/main">
+  <p:cSld>
+    <p:spTree>
+      <p:nvGrpSpPr>
+        <p:cNvPr id="1" name=""/>
+        <p:cNvGrpSpPr/>
+        <p:nvPr/>
+      </p:nvGrpSpPr>
+      <p:grpSpPr>
+        <a:xfrm>
+          <a:off x="0" y="0"/>
+          <a:ext cx="0" cy="0"/>
+          <a:chOff x="0" y="0"/>
+          <a:chExt cx="0" cy="0"/>
+        </a:xfrm>
+      </p:grpSpPr>
+      <p:pic>
+        <p:nvPicPr>
+          <p:cNvPr id="3" name="Image 2">
+            <a:extLst>
+              <a:ext uri="{FF2B5EF4-FFF2-40B4-BE49-F238E27FC236}">
+                <a16:creationId xmlns:a16="http://schemas.microsoft.com/office/drawing/2014/main" id="{E153D331-7FFB-976A-DEE5-648DCC7371EE}"/>
+              </a:ext>
+            </a:extLst>
+          </p:cNvPr>
+          <p:cNvPicPr>
+            <a:picLocks noChangeAspect="1"/>
+          </p:cNvPicPr>
+          <p:nvPr/>
+        </p:nvPicPr>
+        <p:blipFill>
+          <a:blip r:embed="rId2"/>
+          <a:stretch>
+            <a:fillRect/>
+          </a:stretch>
+        </p:blipFill>
+        <p:spPr>
+          <a:xfrm>
+            <a:off x="2539817" y="310990"/>
+            <a:ext cx="7112366" cy="6236020"/>
+          </a:xfrm>
+          <a:prstGeom prst="rect">
+            <a:avLst/>
+          </a:prstGeom>
+        </p:spPr>
+      </p:pic>
+      <p:sp>
+        <p:nvSpPr>
+          <p:cNvPr id="4" name="Ellipse 3">
+            <a:extLst>
+              <a:ext uri="{FF2B5EF4-FFF2-40B4-BE49-F238E27FC236}">
+                <a16:creationId xmlns:a16="http://schemas.microsoft.com/office/drawing/2014/main" id="{E7A06740-A18B-FC31-C9DB-B6C28FA5EA5C}"/>
+              </a:ext>
+            </a:extLst>
+          </p:cNvPr>
+          <p:cNvSpPr/>
+          <p:nvPr/>
+        </p:nvSpPr>
+        <p:spPr>
+          <a:xfrm>
+            <a:off x="5591796" y="1151834"/>
+            <a:ext cx="428264" cy="428264"/>
+          </a:xfrm>
+          <a:prstGeom prst="ellipse">
+            <a:avLst/>
+          </a:prstGeom>
+          <a:solidFill>
+            <a:schemeClr val="bg1"/>
+          </a:solidFill>
+          <a:ln w="28575">
+            <a:solidFill>
+              <a:schemeClr val="accent2"/>
+            </a:solidFill>
+          </a:ln>
+          <a:effectLst/>
+        </p:spPr>
+        <p:style>
+          <a:lnRef idx="2">
+            <a:schemeClr val="accent1">
+              <a:shade val="15000"/>
+            </a:schemeClr>
+          </a:lnRef>
+          <a:fillRef idx="1">
+            <a:schemeClr val="accent1"/>
+          </a:fillRef>
+          <a:effectRef idx="0">
+            <a:schemeClr val="accent1"/>
+          </a:effectRef>
+          <a:fontRef idx="minor">
+            <a:schemeClr val="lt1"/>
+          </a:fontRef>
+        </p:style>
+        <p:txBody>
+          <a:bodyPr rtlCol="0" anchor="ctr"/>
+          <a:lstStyle/>
+          <a:p>
+            <a:pPr algn="ctr"/>
+            <a:r>
+              <a:rPr lang="fr-FR" b="1" dirty="0">
+                <a:solidFill>
+                  <a:schemeClr val="accent2"/>
+                </a:solidFill>
+                <a:effectLst>
+                  <a:outerShdw blurRad="38100" dist="38100" dir="2700000" algn="tl">
+                    <a:srgbClr val="000000">
+                      <a:alpha val="43137"/>
+                    </a:srgbClr>
+                  </a:outerShdw>
+                </a:effectLst>
+              </a:rPr>
+              <a:t>3</a:t>
+            </a:r>
+          </a:p>
+        </p:txBody>
+      </p:sp>
+      <p:sp>
+        <p:nvSpPr>
+          <p:cNvPr id="5" name="Flèche : chevron 4">
+            <a:extLst>
+              <a:ext uri="{FF2B5EF4-FFF2-40B4-BE49-F238E27FC236}">
+                <a16:creationId xmlns:a16="http://schemas.microsoft.com/office/drawing/2014/main" id="{FB0B47D3-987F-50C5-3715-8C2A60A43F75}"/>
+              </a:ext>
+            </a:extLst>
+          </p:cNvPr>
+          <p:cNvSpPr/>
+          <p:nvPr/>
+        </p:nvSpPr>
+        <p:spPr>
+          <a:xfrm rot="10800000">
+            <a:off x="5348728" y="1250219"/>
+            <a:ext cx="231493" cy="231493"/>
+          </a:xfrm>
+          <a:prstGeom prst="chevron">
+            <a:avLst/>
+          </a:prstGeom>
+          <a:solidFill>
+            <a:schemeClr val="accent2"/>
+          </a:solidFill>
+          <a:ln>
+            <a:noFill/>
+          </a:ln>
+          <a:effectLst/>
+        </p:spPr>
+        <p:style>
+          <a:lnRef idx="2">
+            <a:schemeClr val="accent1">
+              <a:shade val="15000"/>
+            </a:schemeClr>
+          </a:lnRef>
+          <a:fillRef idx="1">
+            <a:schemeClr val="accent1"/>
+          </a:fillRef>
+          <a:effectRef idx="0">
+            <a:schemeClr val="accent1"/>
+          </a:effectRef>
+          <a:fontRef idx="minor">
+            <a:schemeClr val="lt1"/>
+          </a:fontRef>
+        </p:style>
+        <p:txBody>
+          <a:bodyPr rtlCol="0" anchor="ctr"/>
+          <a:lstStyle/>
+          <a:p>
+            <a:pPr algn="ctr"/>
+            <a:endParaRPr lang="fr-FR">
+              <a:solidFill>
+                <a:schemeClr val="tx1"/>
+              </a:solidFill>
+            </a:endParaRPr>
+          </a:p>
+        </p:txBody>
+      </p:sp>
+      <p:sp>
+        <p:nvSpPr>
+          <p:cNvPr id="6" name="Ellipse 5">
+            <a:extLst>
+              <a:ext uri="{FF2B5EF4-FFF2-40B4-BE49-F238E27FC236}">
+                <a16:creationId xmlns:a16="http://schemas.microsoft.com/office/drawing/2014/main" id="{041C29E3-6252-43CC-E5E9-68E8C444C6B5}"/>
+              </a:ext>
+            </a:extLst>
+          </p:cNvPr>
+          <p:cNvSpPr/>
+          <p:nvPr/>
+        </p:nvSpPr>
+        <p:spPr>
+          <a:xfrm>
+            <a:off x="4288776" y="1974794"/>
+            <a:ext cx="428264" cy="428264"/>
+          </a:xfrm>
+          <a:prstGeom prst="ellipse">
+            <a:avLst/>
+          </a:prstGeom>
+          <a:solidFill>
+            <a:schemeClr val="bg1"/>
+          </a:solidFill>
+          <a:ln w="28575">
+            <a:solidFill>
+              <a:schemeClr val="accent2"/>
+            </a:solidFill>
+          </a:ln>
+          <a:effectLst/>
+        </p:spPr>
+        <p:style>
+          <a:lnRef idx="2">
+            <a:schemeClr val="accent1">
+              <a:shade val="15000"/>
+            </a:schemeClr>
+          </a:lnRef>
+          <a:fillRef idx="1">
+            <a:schemeClr val="accent1"/>
+          </a:fillRef>
+          <a:effectRef idx="0">
+            <a:schemeClr val="accent1"/>
+          </a:effectRef>
+          <a:fontRef idx="minor">
+            <a:schemeClr val="lt1"/>
+          </a:fontRef>
+        </p:style>
+        <p:txBody>
+          <a:bodyPr rtlCol="0" anchor="ctr"/>
+          <a:lstStyle/>
+          <a:p>
+            <a:pPr algn="ctr"/>
+            <a:r>
+              <a:rPr lang="fr-FR" b="1" dirty="0">
+                <a:solidFill>
+                  <a:schemeClr val="accent2"/>
+                </a:solidFill>
+                <a:effectLst>
+                  <a:outerShdw blurRad="38100" dist="38100" dir="2700000" algn="tl">
+                    <a:srgbClr val="000000">
+                      <a:alpha val="43137"/>
+                    </a:srgbClr>
+                  </a:outerShdw>
+                </a:effectLst>
+              </a:rPr>
+              <a:t>4</a:t>
+            </a:r>
+          </a:p>
+        </p:txBody>
+      </p:sp>
+      <p:sp>
+        <p:nvSpPr>
+          <p:cNvPr id="7" name="Flèche : chevron 6">
+            <a:extLst>
+              <a:ext uri="{FF2B5EF4-FFF2-40B4-BE49-F238E27FC236}">
+                <a16:creationId xmlns:a16="http://schemas.microsoft.com/office/drawing/2014/main" id="{8D573533-9173-8B90-21F5-F82FBD2B076E}"/>
+              </a:ext>
+            </a:extLst>
+          </p:cNvPr>
+          <p:cNvSpPr/>
+          <p:nvPr/>
+        </p:nvSpPr>
+        <p:spPr>
+          <a:xfrm rot="16200000">
+            <a:off x="4387161" y="1743301"/>
+            <a:ext cx="231493" cy="231493"/>
+          </a:xfrm>
+          <a:prstGeom prst="chevron">
+            <a:avLst/>
+          </a:prstGeom>
+          <a:solidFill>
+            <a:schemeClr val="accent2"/>
+          </a:solidFill>
+          <a:ln>
+            <a:noFill/>
+          </a:ln>
+          <a:effectLst/>
+        </p:spPr>
+        <p:style>
+          <a:lnRef idx="2">
+            <a:schemeClr val="accent1">
+              <a:shade val="15000"/>
+            </a:schemeClr>
+          </a:lnRef>
+          <a:fillRef idx="1">
+            <a:schemeClr val="accent1"/>
+          </a:fillRef>
+          <a:effectRef idx="0">
+            <a:schemeClr val="accent1"/>
+          </a:effectRef>
+          <a:fontRef idx="minor">
+            <a:schemeClr val="lt1"/>
+          </a:fontRef>
+        </p:style>
+        <p:txBody>
+          <a:bodyPr rtlCol="0" anchor="ctr"/>
+          <a:lstStyle/>
+          <a:p>
+            <a:pPr algn="ctr"/>
+            <a:endParaRPr lang="fr-FR">
+              <a:solidFill>
+                <a:schemeClr val="tx1"/>
+              </a:solidFill>
+            </a:endParaRPr>
+          </a:p>
+        </p:txBody>
+      </p:sp>
+    </p:spTree>
+    <p:extLst>
+      <p:ext uri="{BB962C8B-B14F-4D97-AF65-F5344CB8AC3E}">
+        <p14:creationId xmlns:p14="http://schemas.microsoft.com/office/powerpoint/2010/main" val="1468337731"/>
+      </p:ext>
+    </p:extLst>
+  </p:cSld>
+  <p:clrMapOvr>
+    <a:masterClrMapping/>
+  </p:clrMapOvr>
+</p:sld>
+</file>
+
 <file path=ppt/theme/theme1.xml><?xml version="1.0" encoding="utf-8"?>
 <a:theme xmlns:a="http://schemas.openxmlformats.org/drawingml/2006/main" name="Thème Office">
   <a:themeElements>

--- a/DOCUMENTATION/Illustrations.pptx
+++ b/DOCUMENTATION/Illustrations.pptx
@@ -8,6 +8,7 @@
     <p:sldId id="256" r:id="rId2"/>
     <p:sldId id="257" r:id="rId3"/>
     <p:sldId id="258" r:id="rId4"/>
+    <p:sldId id="259" r:id="rId5"/>
   </p:sldIdLst>
   <p:sldSz cx="12192000" cy="6858000"/>
   <p:notesSz cx="6858000" cy="9144000"/>
@@ -4844,292 +4845,520 @@
           <a:chExt cx="0" cy="0"/>
         </a:xfrm>
       </p:grpSpPr>
-      <p:pic>
-        <p:nvPicPr>
-          <p:cNvPr id="3" name="Image 2">
-            <a:extLst>
-              <a:ext uri="{FF2B5EF4-FFF2-40B4-BE49-F238E27FC236}">
-                <a16:creationId xmlns:a16="http://schemas.microsoft.com/office/drawing/2014/main" id="{E153D331-7FFB-976A-DEE5-648DCC7371EE}"/>
-              </a:ext>
-            </a:extLst>
-          </p:cNvPr>
-          <p:cNvPicPr>
-            <a:picLocks noChangeAspect="1"/>
-          </p:cNvPicPr>
+      <p:grpSp>
+        <p:nvGrpSpPr>
+          <p:cNvPr id="8" name="Groupe 7">
+            <a:extLst>
+              <a:ext uri="{FF2B5EF4-FFF2-40B4-BE49-F238E27FC236}">
+                <a16:creationId xmlns:a16="http://schemas.microsoft.com/office/drawing/2014/main" id="{D7347256-DF0D-8650-8261-396E6D24E49C}"/>
+              </a:ext>
+            </a:extLst>
+          </p:cNvPr>
+          <p:cNvGrpSpPr/>
           <p:nvPr/>
-        </p:nvPicPr>
-        <p:blipFill>
-          <a:blip r:embed="rId2"/>
-          <a:stretch>
-            <a:fillRect/>
-          </a:stretch>
-        </p:blipFill>
-        <p:spPr>
+        </p:nvGrpSpPr>
+        <p:grpSpPr>
           <a:xfrm>
             <a:off x="2539817" y="310990"/>
             <a:ext cx="7112366" cy="6236020"/>
+            <a:chOff x="2539817" y="310990"/>
+            <a:chExt cx="7112366" cy="6236020"/>
           </a:xfrm>
-          <a:prstGeom prst="rect">
-            <a:avLst/>
-          </a:prstGeom>
-        </p:spPr>
-      </p:pic>
-      <p:sp>
-        <p:nvSpPr>
-          <p:cNvPr id="4" name="Ellipse 3">
-            <a:extLst>
-              <a:ext uri="{FF2B5EF4-FFF2-40B4-BE49-F238E27FC236}">
-                <a16:creationId xmlns:a16="http://schemas.microsoft.com/office/drawing/2014/main" id="{E7A06740-A18B-FC31-C9DB-B6C28FA5EA5C}"/>
-              </a:ext>
-            </a:extLst>
-          </p:cNvPr>
-          <p:cNvSpPr/>
-          <p:nvPr/>
-        </p:nvSpPr>
-        <p:spPr>
-          <a:xfrm>
-            <a:off x="5591796" y="1151834"/>
-            <a:ext cx="428264" cy="428264"/>
-          </a:xfrm>
-          <a:prstGeom prst="ellipse">
-            <a:avLst/>
-          </a:prstGeom>
-          <a:solidFill>
-            <a:schemeClr val="bg1"/>
-          </a:solidFill>
-          <a:ln w="28575">
+        </p:grpSpPr>
+        <p:pic>
+          <p:nvPicPr>
+            <p:cNvPr id="3" name="Image 2">
+              <a:extLst>
+                <a:ext uri="{FF2B5EF4-FFF2-40B4-BE49-F238E27FC236}">
+                  <a16:creationId xmlns:a16="http://schemas.microsoft.com/office/drawing/2014/main" id="{E153D331-7FFB-976A-DEE5-648DCC7371EE}"/>
+                </a:ext>
+              </a:extLst>
+            </p:cNvPr>
+            <p:cNvPicPr>
+              <a:picLocks noChangeAspect="1"/>
+            </p:cNvPicPr>
+            <p:nvPr/>
+          </p:nvPicPr>
+          <p:blipFill>
+            <a:blip r:embed="rId2"/>
+            <a:stretch>
+              <a:fillRect/>
+            </a:stretch>
+          </p:blipFill>
+          <p:spPr>
+            <a:xfrm>
+              <a:off x="2539817" y="310990"/>
+              <a:ext cx="7112366" cy="6236020"/>
+            </a:xfrm>
+            <a:prstGeom prst="rect">
+              <a:avLst/>
+            </a:prstGeom>
+          </p:spPr>
+        </p:pic>
+        <p:sp>
+          <p:nvSpPr>
+            <p:cNvPr id="4" name="Ellipse 3">
+              <a:extLst>
+                <a:ext uri="{FF2B5EF4-FFF2-40B4-BE49-F238E27FC236}">
+                  <a16:creationId xmlns:a16="http://schemas.microsoft.com/office/drawing/2014/main" id="{E7A06740-A18B-FC31-C9DB-B6C28FA5EA5C}"/>
+                </a:ext>
+              </a:extLst>
+            </p:cNvPr>
+            <p:cNvSpPr/>
+            <p:nvPr/>
+          </p:nvSpPr>
+          <p:spPr>
+            <a:xfrm>
+              <a:off x="5591796" y="1151834"/>
+              <a:ext cx="428264" cy="428264"/>
+            </a:xfrm>
+            <a:prstGeom prst="ellipse">
+              <a:avLst/>
+            </a:prstGeom>
+            <a:solidFill>
+              <a:schemeClr val="bg1"/>
+            </a:solidFill>
+            <a:ln w="28575">
+              <a:solidFill>
+                <a:schemeClr val="accent2"/>
+              </a:solidFill>
+            </a:ln>
+            <a:effectLst/>
+          </p:spPr>
+          <p:style>
+            <a:lnRef idx="2">
+              <a:schemeClr val="accent1">
+                <a:shade val="15000"/>
+              </a:schemeClr>
+            </a:lnRef>
+            <a:fillRef idx="1">
+              <a:schemeClr val="accent1"/>
+            </a:fillRef>
+            <a:effectRef idx="0">
+              <a:schemeClr val="accent1"/>
+            </a:effectRef>
+            <a:fontRef idx="minor">
+              <a:schemeClr val="lt1"/>
+            </a:fontRef>
+          </p:style>
+          <p:txBody>
+            <a:bodyPr rtlCol="0" anchor="ctr"/>
+            <a:lstStyle/>
+            <a:p>
+              <a:pPr algn="ctr"/>
+              <a:r>
+                <a:rPr lang="fr-FR" b="1" dirty="0">
+                  <a:solidFill>
+                    <a:schemeClr val="accent2"/>
+                  </a:solidFill>
+                  <a:effectLst>
+                    <a:outerShdw blurRad="38100" dist="38100" dir="2700000" algn="tl">
+                      <a:srgbClr val="000000">
+                        <a:alpha val="43137"/>
+                      </a:srgbClr>
+                    </a:outerShdw>
+                  </a:effectLst>
+                </a:rPr>
+                <a:t>3</a:t>
+              </a:r>
+            </a:p>
+          </p:txBody>
+        </p:sp>
+        <p:sp>
+          <p:nvSpPr>
+            <p:cNvPr id="5" name="Flèche : chevron 4">
+              <a:extLst>
+                <a:ext uri="{FF2B5EF4-FFF2-40B4-BE49-F238E27FC236}">
+                  <a16:creationId xmlns:a16="http://schemas.microsoft.com/office/drawing/2014/main" id="{FB0B47D3-987F-50C5-3715-8C2A60A43F75}"/>
+                </a:ext>
+              </a:extLst>
+            </p:cNvPr>
+            <p:cNvSpPr/>
+            <p:nvPr/>
+          </p:nvSpPr>
+          <p:spPr>
+            <a:xfrm rot="10800000">
+              <a:off x="5348728" y="1250219"/>
+              <a:ext cx="231493" cy="231493"/>
+            </a:xfrm>
+            <a:prstGeom prst="chevron">
+              <a:avLst/>
+            </a:prstGeom>
             <a:solidFill>
               <a:schemeClr val="accent2"/>
             </a:solidFill>
-          </a:ln>
-          <a:effectLst/>
-        </p:spPr>
-        <p:style>
-          <a:lnRef idx="2">
-            <a:schemeClr val="accent1">
-              <a:shade val="15000"/>
-            </a:schemeClr>
-          </a:lnRef>
-          <a:fillRef idx="1">
-            <a:schemeClr val="accent1"/>
-          </a:fillRef>
-          <a:effectRef idx="0">
-            <a:schemeClr val="accent1"/>
-          </a:effectRef>
-          <a:fontRef idx="minor">
-            <a:schemeClr val="lt1"/>
-          </a:fontRef>
-        </p:style>
-        <p:txBody>
-          <a:bodyPr rtlCol="0" anchor="ctr"/>
-          <a:lstStyle/>
-          <a:p>
-            <a:pPr algn="ctr"/>
-            <a:r>
-              <a:rPr lang="fr-FR" b="1" dirty="0">
+            <a:ln>
+              <a:noFill/>
+            </a:ln>
+            <a:effectLst/>
+          </p:spPr>
+          <p:style>
+            <a:lnRef idx="2">
+              <a:schemeClr val="accent1">
+                <a:shade val="15000"/>
+              </a:schemeClr>
+            </a:lnRef>
+            <a:fillRef idx="1">
+              <a:schemeClr val="accent1"/>
+            </a:fillRef>
+            <a:effectRef idx="0">
+              <a:schemeClr val="accent1"/>
+            </a:effectRef>
+            <a:fontRef idx="minor">
+              <a:schemeClr val="lt1"/>
+            </a:fontRef>
+          </p:style>
+          <p:txBody>
+            <a:bodyPr rtlCol="0" anchor="ctr"/>
+            <a:lstStyle/>
+            <a:p>
+              <a:pPr algn="ctr"/>
+              <a:endParaRPr lang="fr-FR">
                 <a:solidFill>
-                  <a:schemeClr val="accent2"/>
+                  <a:schemeClr val="tx1"/>
                 </a:solidFill>
-                <a:effectLst>
-                  <a:outerShdw blurRad="38100" dist="38100" dir="2700000" algn="tl">
-                    <a:srgbClr val="000000">
-                      <a:alpha val="43137"/>
-                    </a:srgbClr>
-                  </a:outerShdw>
-                </a:effectLst>
-              </a:rPr>
-              <a:t>3</a:t>
-            </a:r>
-          </a:p>
-        </p:txBody>
-      </p:sp>
-      <p:sp>
-        <p:nvSpPr>
-          <p:cNvPr id="5" name="Flèche : chevron 4">
-            <a:extLst>
-              <a:ext uri="{FF2B5EF4-FFF2-40B4-BE49-F238E27FC236}">
-                <a16:creationId xmlns:a16="http://schemas.microsoft.com/office/drawing/2014/main" id="{FB0B47D3-987F-50C5-3715-8C2A60A43F75}"/>
-              </a:ext>
-            </a:extLst>
-          </p:cNvPr>
-          <p:cNvSpPr/>
-          <p:nvPr/>
-        </p:nvSpPr>
-        <p:spPr>
-          <a:xfrm rot="10800000">
-            <a:off x="5348728" y="1250219"/>
-            <a:ext cx="231493" cy="231493"/>
-          </a:xfrm>
-          <a:prstGeom prst="chevron">
-            <a:avLst/>
-          </a:prstGeom>
-          <a:solidFill>
-            <a:schemeClr val="accent2"/>
-          </a:solidFill>
-          <a:ln>
-            <a:noFill/>
-          </a:ln>
-          <a:effectLst/>
-        </p:spPr>
-        <p:style>
-          <a:lnRef idx="2">
-            <a:schemeClr val="accent1">
-              <a:shade val="15000"/>
-            </a:schemeClr>
-          </a:lnRef>
-          <a:fillRef idx="1">
-            <a:schemeClr val="accent1"/>
-          </a:fillRef>
-          <a:effectRef idx="0">
-            <a:schemeClr val="accent1"/>
-          </a:effectRef>
-          <a:fontRef idx="minor">
-            <a:schemeClr val="lt1"/>
-          </a:fontRef>
-        </p:style>
-        <p:txBody>
-          <a:bodyPr rtlCol="0" anchor="ctr"/>
-          <a:lstStyle/>
-          <a:p>
-            <a:pPr algn="ctr"/>
-            <a:endParaRPr lang="fr-FR">
+              </a:endParaRPr>
+            </a:p>
+          </p:txBody>
+        </p:sp>
+        <p:sp>
+          <p:nvSpPr>
+            <p:cNvPr id="6" name="Ellipse 5">
+              <a:extLst>
+                <a:ext uri="{FF2B5EF4-FFF2-40B4-BE49-F238E27FC236}">
+                  <a16:creationId xmlns:a16="http://schemas.microsoft.com/office/drawing/2014/main" id="{041C29E3-6252-43CC-E5E9-68E8C444C6B5}"/>
+                </a:ext>
+              </a:extLst>
+            </p:cNvPr>
+            <p:cNvSpPr/>
+            <p:nvPr/>
+          </p:nvSpPr>
+          <p:spPr>
+            <a:xfrm>
+              <a:off x="4288776" y="1974794"/>
+              <a:ext cx="428264" cy="428264"/>
+            </a:xfrm>
+            <a:prstGeom prst="ellipse">
+              <a:avLst/>
+            </a:prstGeom>
+            <a:solidFill>
+              <a:schemeClr val="bg1"/>
+            </a:solidFill>
+            <a:ln w="28575">
               <a:solidFill>
-                <a:schemeClr val="tx1"/>
+                <a:schemeClr val="accent2"/>
               </a:solidFill>
-            </a:endParaRPr>
-          </a:p>
-        </p:txBody>
-      </p:sp>
-      <p:sp>
-        <p:nvSpPr>
-          <p:cNvPr id="6" name="Ellipse 5">
-            <a:extLst>
-              <a:ext uri="{FF2B5EF4-FFF2-40B4-BE49-F238E27FC236}">
-                <a16:creationId xmlns:a16="http://schemas.microsoft.com/office/drawing/2014/main" id="{041C29E3-6252-43CC-E5E9-68E8C444C6B5}"/>
-              </a:ext>
-            </a:extLst>
-          </p:cNvPr>
-          <p:cNvSpPr/>
-          <p:nvPr/>
-        </p:nvSpPr>
-        <p:spPr>
-          <a:xfrm>
-            <a:off x="4288776" y="1974794"/>
-            <a:ext cx="428264" cy="428264"/>
-          </a:xfrm>
-          <a:prstGeom prst="ellipse">
-            <a:avLst/>
-          </a:prstGeom>
-          <a:solidFill>
-            <a:schemeClr val="bg1"/>
-          </a:solidFill>
-          <a:ln w="28575">
+            </a:ln>
+            <a:effectLst/>
+          </p:spPr>
+          <p:style>
+            <a:lnRef idx="2">
+              <a:schemeClr val="accent1">
+                <a:shade val="15000"/>
+              </a:schemeClr>
+            </a:lnRef>
+            <a:fillRef idx="1">
+              <a:schemeClr val="accent1"/>
+            </a:fillRef>
+            <a:effectRef idx="0">
+              <a:schemeClr val="accent1"/>
+            </a:effectRef>
+            <a:fontRef idx="minor">
+              <a:schemeClr val="lt1"/>
+            </a:fontRef>
+          </p:style>
+          <p:txBody>
+            <a:bodyPr rtlCol="0" anchor="ctr"/>
+            <a:lstStyle/>
+            <a:p>
+              <a:pPr algn="ctr"/>
+              <a:r>
+                <a:rPr lang="fr-FR" b="1" dirty="0">
+                  <a:solidFill>
+                    <a:schemeClr val="accent2"/>
+                  </a:solidFill>
+                  <a:effectLst>
+                    <a:outerShdw blurRad="38100" dist="38100" dir="2700000" algn="tl">
+                      <a:srgbClr val="000000">
+                        <a:alpha val="43137"/>
+                      </a:srgbClr>
+                    </a:outerShdw>
+                  </a:effectLst>
+                </a:rPr>
+                <a:t>4</a:t>
+              </a:r>
+            </a:p>
+          </p:txBody>
+        </p:sp>
+        <p:sp>
+          <p:nvSpPr>
+            <p:cNvPr id="7" name="Flèche : chevron 6">
+              <a:extLst>
+                <a:ext uri="{FF2B5EF4-FFF2-40B4-BE49-F238E27FC236}">
+                  <a16:creationId xmlns:a16="http://schemas.microsoft.com/office/drawing/2014/main" id="{8D573533-9173-8B90-21F5-F82FBD2B076E}"/>
+                </a:ext>
+              </a:extLst>
+            </p:cNvPr>
+            <p:cNvSpPr/>
+            <p:nvPr/>
+          </p:nvSpPr>
+          <p:spPr>
+            <a:xfrm rot="16200000">
+              <a:off x="4387161" y="1743301"/>
+              <a:ext cx="231493" cy="231493"/>
+            </a:xfrm>
+            <a:prstGeom prst="chevron">
+              <a:avLst/>
+            </a:prstGeom>
             <a:solidFill>
               <a:schemeClr val="accent2"/>
             </a:solidFill>
-          </a:ln>
-          <a:effectLst/>
-        </p:spPr>
-        <p:style>
-          <a:lnRef idx="2">
-            <a:schemeClr val="accent1">
-              <a:shade val="15000"/>
-            </a:schemeClr>
-          </a:lnRef>
-          <a:fillRef idx="1">
-            <a:schemeClr val="accent1"/>
-          </a:fillRef>
-          <a:effectRef idx="0">
-            <a:schemeClr val="accent1"/>
-          </a:effectRef>
-          <a:fontRef idx="minor">
-            <a:schemeClr val="lt1"/>
-          </a:fontRef>
-        </p:style>
-        <p:txBody>
-          <a:bodyPr rtlCol="0" anchor="ctr"/>
-          <a:lstStyle/>
-          <a:p>
-            <a:pPr algn="ctr"/>
-            <a:r>
-              <a:rPr lang="fr-FR" b="1" dirty="0">
+            <a:ln>
+              <a:noFill/>
+            </a:ln>
+            <a:effectLst/>
+          </p:spPr>
+          <p:style>
+            <a:lnRef idx="2">
+              <a:schemeClr val="accent1">
+                <a:shade val="15000"/>
+              </a:schemeClr>
+            </a:lnRef>
+            <a:fillRef idx="1">
+              <a:schemeClr val="accent1"/>
+            </a:fillRef>
+            <a:effectRef idx="0">
+              <a:schemeClr val="accent1"/>
+            </a:effectRef>
+            <a:fontRef idx="minor">
+              <a:schemeClr val="lt1"/>
+            </a:fontRef>
+          </p:style>
+          <p:txBody>
+            <a:bodyPr rtlCol="0" anchor="ctr"/>
+            <a:lstStyle/>
+            <a:p>
+              <a:pPr algn="ctr"/>
+              <a:endParaRPr lang="fr-FR">
                 <a:solidFill>
-                  <a:schemeClr val="accent2"/>
+                  <a:schemeClr val="tx1"/>
                 </a:solidFill>
-                <a:effectLst>
-                  <a:outerShdw blurRad="38100" dist="38100" dir="2700000" algn="tl">
-                    <a:srgbClr val="000000">
-                      <a:alpha val="43137"/>
-                    </a:srgbClr>
-                  </a:outerShdw>
-                </a:effectLst>
-              </a:rPr>
-              <a:t>4</a:t>
-            </a:r>
-          </a:p>
-        </p:txBody>
-      </p:sp>
-      <p:sp>
-        <p:nvSpPr>
-          <p:cNvPr id="7" name="Flèche : chevron 6">
-            <a:extLst>
-              <a:ext uri="{FF2B5EF4-FFF2-40B4-BE49-F238E27FC236}">
-                <a16:creationId xmlns:a16="http://schemas.microsoft.com/office/drawing/2014/main" id="{8D573533-9173-8B90-21F5-F82FBD2B076E}"/>
-              </a:ext>
-            </a:extLst>
-          </p:cNvPr>
-          <p:cNvSpPr/>
-          <p:nvPr/>
-        </p:nvSpPr>
-        <p:spPr>
-          <a:xfrm rot="16200000">
-            <a:off x="4387161" y="1743301"/>
-            <a:ext cx="231493" cy="231493"/>
-          </a:xfrm>
-          <a:prstGeom prst="chevron">
-            <a:avLst/>
-          </a:prstGeom>
-          <a:solidFill>
-            <a:schemeClr val="accent2"/>
-          </a:solidFill>
-          <a:ln>
-            <a:noFill/>
-          </a:ln>
-          <a:effectLst/>
-        </p:spPr>
-        <p:style>
-          <a:lnRef idx="2">
-            <a:schemeClr val="accent1">
-              <a:shade val="15000"/>
-            </a:schemeClr>
-          </a:lnRef>
-          <a:fillRef idx="1">
-            <a:schemeClr val="accent1"/>
-          </a:fillRef>
-          <a:effectRef idx="0">
-            <a:schemeClr val="accent1"/>
-          </a:effectRef>
-          <a:fontRef idx="minor">
-            <a:schemeClr val="lt1"/>
-          </a:fontRef>
-        </p:style>
-        <p:txBody>
-          <a:bodyPr rtlCol="0" anchor="ctr"/>
-          <a:lstStyle/>
-          <a:p>
-            <a:pPr algn="ctr"/>
-            <a:endParaRPr lang="fr-FR">
-              <a:solidFill>
-                <a:schemeClr val="tx1"/>
-              </a:solidFill>
-            </a:endParaRPr>
-          </a:p>
-        </p:txBody>
-      </p:sp>
+              </a:endParaRPr>
+            </a:p>
+          </p:txBody>
+        </p:sp>
+      </p:grpSp>
     </p:spTree>
     <p:extLst>
       <p:ext uri="{BB962C8B-B14F-4D97-AF65-F5344CB8AC3E}">
         <p14:creationId xmlns:p14="http://schemas.microsoft.com/office/powerpoint/2010/main" val="1468337731"/>
+      </p:ext>
+    </p:extLst>
+  </p:cSld>
+  <p:clrMapOvr>
+    <a:masterClrMapping/>
+  </p:clrMapOvr>
+</p:sld>
+</file>
+
+<file path=ppt/slides/slide4.xml><?xml version="1.0" encoding="utf-8"?>
+<p:sld xmlns:a="http://schemas.openxmlformats.org/drawingml/2006/main" xmlns:r="http://schemas.openxmlformats.org/officeDocument/2006/relationships" xmlns:p="http://schemas.openxmlformats.org/presentationml/2006/main">
+  <p:cSld>
+    <p:spTree>
+      <p:nvGrpSpPr>
+        <p:cNvPr id="1" name=""/>
+        <p:cNvGrpSpPr/>
+        <p:nvPr/>
+      </p:nvGrpSpPr>
+      <p:grpSpPr>
+        <a:xfrm>
+          <a:off x="0" y="0"/>
+          <a:ext cx="0" cy="0"/>
+          <a:chOff x="0" y="0"/>
+          <a:chExt cx="0" cy="0"/>
+        </a:xfrm>
+      </p:grpSpPr>
+      <p:grpSp>
+        <p:nvGrpSpPr>
+          <p:cNvPr id="8" name="Groupe 7">
+            <a:extLst>
+              <a:ext uri="{FF2B5EF4-FFF2-40B4-BE49-F238E27FC236}">
+                <a16:creationId xmlns:a16="http://schemas.microsoft.com/office/drawing/2014/main" id="{DE5B085C-ADA0-0440-26FE-D233696E7E24}"/>
+              </a:ext>
+            </a:extLst>
+          </p:cNvPr>
+          <p:cNvGrpSpPr/>
+          <p:nvPr/>
+        </p:nvGrpSpPr>
+        <p:grpSpPr>
+          <a:xfrm>
+            <a:off x="2539817" y="310990"/>
+            <a:ext cx="7112366" cy="6236020"/>
+            <a:chOff x="2539817" y="310990"/>
+            <a:chExt cx="7112366" cy="6236020"/>
+          </a:xfrm>
+        </p:grpSpPr>
+        <p:pic>
+          <p:nvPicPr>
+            <p:cNvPr id="3" name="Image 2">
+              <a:extLst>
+                <a:ext uri="{FF2B5EF4-FFF2-40B4-BE49-F238E27FC236}">
+                  <a16:creationId xmlns:a16="http://schemas.microsoft.com/office/drawing/2014/main" id="{7D43CF18-0CF1-7C7E-4ACE-6C21DFCCE66A}"/>
+                </a:ext>
+              </a:extLst>
+            </p:cNvPr>
+            <p:cNvPicPr>
+              <a:picLocks noChangeAspect="1"/>
+            </p:cNvPicPr>
+            <p:nvPr/>
+          </p:nvPicPr>
+          <p:blipFill>
+            <a:blip r:embed="rId2"/>
+            <a:stretch>
+              <a:fillRect/>
+            </a:stretch>
+          </p:blipFill>
+          <p:spPr>
+            <a:xfrm>
+              <a:off x="2539817" y="310990"/>
+              <a:ext cx="7112366" cy="6236020"/>
+            </a:xfrm>
+            <a:prstGeom prst="rect">
+              <a:avLst/>
+            </a:prstGeom>
+          </p:spPr>
+        </p:pic>
+        <p:sp>
+          <p:nvSpPr>
+            <p:cNvPr id="4" name="Ellipse 3">
+              <a:extLst>
+                <a:ext uri="{FF2B5EF4-FFF2-40B4-BE49-F238E27FC236}">
+                  <a16:creationId xmlns:a16="http://schemas.microsoft.com/office/drawing/2014/main" id="{1F0339F9-5ECC-6BDD-845C-CEE7C5B80F9B}"/>
+                </a:ext>
+              </a:extLst>
+            </p:cNvPr>
+            <p:cNvSpPr/>
+            <p:nvPr/>
+          </p:nvSpPr>
+          <p:spPr>
+            <a:xfrm>
+              <a:off x="5553696" y="1464254"/>
+              <a:ext cx="428264" cy="428264"/>
+            </a:xfrm>
+            <a:prstGeom prst="ellipse">
+              <a:avLst/>
+            </a:prstGeom>
+            <a:solidFill>
+              <a:schemeClr val="bg1"/>
+            </a:solidFill>
+            <a:ln w="28575">
+              <a:solidFill>
+                <a:schemeClr val="accent2"/>
+              </a:solidFill>
+            </a:ln>
+            <a:effectLst/>
+          </p:spPr>
+          <p:style>
+            <a:lnRef idx="2">
+              <a:schemeClr val="accent1">
+                <a:shade val="15000"/>
+              </a:schemeClr>
+            </a:lnRef>
+            <a:fillRef idx="1">
+              <a:schemeClr val="accent1"/>
+            </a:fillRef>
+            <a:effectRef idx="0">
+              <a:schemeClr val="accent1"/>
+            </a:effectRef>
+            <a:fontRef idx="minor">
+              <a:schemeClr val="lt1"/>
+            </a:fontRef>
+          </p:style>
+          <p:txBody>
+            <a:bodyPr rtlCol="0" anchor="ctr"/>
+            <a:lstStyle/>
+            <a:p>
+              <a:pPr algn="ctr"/>
+              <a:r>
+                <a:rPr lang="fr-FR" b="1" dirty="0">
+                  <a:solidFill>
+                    <a:schemeClr val="accent2"/>
+                  </a:solidFill>
+                  <a:effectLst>
+                    <a:outerShdw blurRad="38100" dist="38100" dir="2700000" algn="tl">
+                      <a:srgbClr val="000000">
+                        <a:alpha val="43137"/>
+                      </a:srgbClr>
+                    </a:outerShdw>
+                  </a:effectLst>
+                </a:rPr>
+                <a:t>5</a:t>
+              </a:r>
+            </a:p>
+          </p:txBody>
+        </p:sp>
+        <p:sp>
+          <p:nvSpPr>
+            <p:cNvPr id="5" name="Flèche : chevron 4">
+              <a:extLst>
+                <a:ext uri="{FF2B5EF4-FFF2-40B4-BE49-F238E27FC236}">
+                  <a16:creationId xmlns:a16="http://schemas.microsoft.com/office/drawing/2014/main" id="{A0A91A82-8B1A-EED3-7050-1D7AFDFAD165}"/>
+                </a:ext>
+              </a:extLst>
+            </p:cNvPr>
+            <p:cNvSpPr/>
+            <p:nvPr/>
+          </p:nvSpPr>
+          <p:spPr>
+            <a:xfrm rot="10800000">
+              <a:off x="5310628" y="1562639"/>
+              <a:ext cx="231493" cy="231493"/>
+            </a:xfrm>
+            <a:prstGeom prst="chevron">
+              <a:avLst/>
+            </a:prstGeom>
+            <a:solidFill>
+              <a:schemeClr val="accent2"/>
+            </a:solidFill>
+            <a:ln>
+              <a:noFill/>
+            </a:ln>
+            <a:effectLst/>
+          </p:spPr>
+          <p:style>
+            <a:lnRef idx="2">
+              <a:schemeClr val="accent1">
+                <a:shade val="15000"/>
+              </a:schemeClr>
+            </a:lnRef>
+            <a:fillRef idx="1">
+              <a:schemeClr val="accent1"/>
+            </a:fillRef>
+            <a:effectRef idx="0">
+              <a:schemeClr val="accent1"/>
+            </a:effectRef>
+            <a:fontRef idx="minor">
+              <a:schemeClr val="lt1"/>
+            </a:fontRef>
+          </p:style>
+          <p:txBody>
+            <a:bodyPr rtlCol="0" anchor="ctr"/>
+            <a:lstStyle/>
+            <a:p>
+              <a:pPr algn="ctr"/>
+              <a:endParaRPr lang="fr-FR">
+                <a:solidFill>
+                  <a:schemeClr val="tx1"/>
+                </a:solidFill>
+              </a:endParaRPr>
+            </a:p>
+          </p:txBody>
+        </p:sp>
+      </p:grpSp>
+    </p:spTree>
+    <p:extLst>
+      <p:ext uri="{BB962C8B-B14F-4D97-AF65-F5344CB8AC3E}">
+        <p14:creationId xmlns:p14="http://schemas.microsoft.com/office/powerpoint/2010/main" val="153942"/>
       </p:ext>
     </p:extLst>
   </p:cSld>
